--- a/널스탁_결제경로_파일.pptx
+++ b/널스탁_결제경로_파일.pptx
@@ -3491,7 +3491,7 @@
                 <a:latin typeface="Apple SD Gothic Neo"/>
                 <a:ea typeface="Apple SD Gothic Neo"/>
               </a:rPr>
-              <a:t>작성일: 2026-07-10  ·  결제수단: 토스페이먼츠 자동결제(빌링) — 신용·체크카드 정기결제  ·  월 구독형 무형 서비스</a:t>
+              <a:t>작성일: 2026-07-13  ·  결제수단: 토스페이먼츠 자동결제(빌링) — 신용·체크카드 정기결제  ·  월 구독형 무형 서비스</a:t>
             </a:r>
           </a:p>
         </p:txBody>
@@ -3672,7 +3672,7 @@
                 <a:latin typeface="Apple SD Gothic Neo"/>
                 <a:ea typeface="Apple SD Gothic Neo"/>
               </a:rPr>
-              <a:t>경로: https://nullstock.im/   ·   캡처: 2026. 7. 10. 15시 1분 48초</a:t>
+              <a:t>경로: https://nullstock.im/   ·   캡처: 2026. 7. 13. 23시 23분 41초</a:t>
             </a:r>
           </a:p>
         </p:txBody>
@@ -3882,7 +3882,7 @@
                 <a:latin typeface="Apple SD Gothic Neo"/>
                 <a:ea typeface="Apple SD Gothic Neo"/>
               </a:rPr>
-              <a:t>경로: https://nullstock.im/   ·   캡처: 2026. 7. 10. 15시 1분 50초</a:t>
+              <a:t>경로: https://nullstock.im/   ·   캡처: 2026. 7. 13. 23시 23분 43초</a:t>
             </a:r>
           </a:p>
         </p:txBody>
@@ -4136,7 +4136,7 @@
                 <a:latin typeface="Apple SD Gothic Neo"/>
                 <a:ea typeface="Apple SD Gothic Neo"/>
               </a:rPr>
-              <a:t>경로: https://nullstock.im/?legal=terms   ·   캡처: 2026. 7. 10. 15시 1분 53초</a:t>
+              <a:t>경로: https://nullstock.im/?legal=terms   ·   캡처: 2026. 7. 13. 23시 23분 46초</a:t>
             </a:r>
           </a:p>
         </p:txBody>
@@ -4346,7 +4346,7 @@
                 <a:latin typeface="Apple SD Gothic Neo"/>
                 <a:ea typeface="Apple SD Gothic Neo"/>
               </a:rPr>
-              <a:t>경로: https://nullstock.im/   ·   캡처: 2026. 7. 10. 15시 1분 56초</a:t>
+              <a:t>경로: https://nullstock.im/   ·   캡처: 2026. 7. 13. 23시 23분 50초</a:t>
             </a:r>
           </a:p>
         </p:txBody>
@@ -4556,7 +4556,7 @@
                 <a:latin typeface="Apple SD Gothic Neo"/>
                 <a:ea typeface="Apple SD Gothic Neo"/>
               </a:rPr>
-              <a:t>경로: https://nullstock.im/pricing   ·   캡처: 2026. 7. 10. 15시 2분 3초</a:t>
+              <a:t>경로: https://nullstock.im/pricing   ·   캡처: 2026. 7. 13. 23시 23분 58초</a:t>
             </a:r>
           </a:p>
         </p:txBody>
@@ -4695,7 +4695,7 @@
                 <a:latin typeface="Apple SD Gothic Neo"/>
                 <a:ea typeface="Apple SD Gothic Neo"/>
               </a:rPr>
-              <a:t>구독 결제 페이지 — 상품명·금액·자동갱신 조건 고지</a:t>
+              <a:t>구독 결제 확인 창 — 상품명·금액·자동갱신 조건 고지</a:t>
             </a:r>
           </a:p>
           <a:p>
@@ -4708,7 +4708,7 @@
                 <a:latin typeface="Apple SD Gothic Neo"/>
                 <a:ea typeface="Apple SD Gothic Neo"/>
               </a:rPr>
-              <a:t>월 자동결제(빌링) 조건(금액·갱신·해지 방법·환불 규정)을 고지하고 '카드 등록하고 구독 시작하기'로 진행합니다.</a:t>
+              <a:t>요금제에서 '구독 시작하기'를 누르면 주문 확인 창이 열리며, 월 자동결제(빌링) 조건(상품·금액·갱신 주기·환불 규정)을 고지한 뒤 '결제하기'로 진행합니다.</a:t>
             </a:r>
           </a:p>
         </p:txBody>
@@ -4766,14 +4766,14 @@
                 <a:latin typeface="Apple SD Gothic Neo"/>
                 <a:ea typeface="Apple SD Gothic Neo"/>
               </a:rPr>
-              <a:t>경로: https://nullstock.im/pricing/checkout?plan=PRO   ·   캡처: 2026. 7. 10. 17시 32분 43초   ·   테스트 환경</a:t>
+              <a:t>경로: https://nullstock.im/pricing   ·   캡처: 2026. 7. 13. 23시 24분 2초</a:t>
             </a:r>
           </a:p>
         </p:txBody>
       </p:sp>
       <p:pic>
         <p:nvPicPr>
-          <p:cNvPr id="5" name="Picture 4" descr="06_checkout_billing.png"/>
+          <p:cNvPr id="5" name="Picture 4" descr="06_checkout_modal.png"/>
           <p:cNvPicPr>
             <a:picLocks noChangeAspect="1"/>
           </p:cNvPicPr>
@@ -4976,7 +4976,7 @@
                 <a:latin typeface="Apple SD Gothic Neo"/>
                 <a:ea typeface="Apple SD Gothic Neo"/>
               </a:rPr>
-              <a:t>경로: https://nullstock.im/pricing/checkout?plan=PRO   ·   캡처: 2026. 7. 10. 17시 32분 51초   ·   테스트용 결제창</a:t>
+              <a:t>경로: https://nullstock.im/pricing   ·   캡처: 2026. 7. 13. 23시 24분 52초   ·   테스트용 결제창</a:t>
             </a:r>
           </a:p>
         </p:txBody>
